--- a/generated/Tier 1 Broker Scorecards/AMC Agents LLC_Broker_Scorecard.pptx
+++ b/generated/Tier 1 Broker Scorecards/AMC Agents LLC_Broker_Scorecard.pptx
@@ -3357,7 +3357,7 @@
                         <a:rPr sz="800">
                           <a:latin typeface="Segoe UI"/>
                         </a:rPr>
-                        <a:t>$5,217,115.34 / $7,372,349.93 / $3,489,933.66</a:t>
+                        <a:t>$5,217,115.34 / $7,411,686.83 / $3,529,270.56</a:t>
                       </a:r>
                     </a:p>
                   </a:txBody>
@@ -3431,7 +3431,7 @@
                         <a:rPr sz="900">
                           <a:latin typeface="Segoe UI"/>
                         </a:rPr>
-                        <a:t>$7,303,961.48  (47.8% achieved)</a:t>
+                        <a:t>$7,303,961.48  (48.3% achieved)</a:t>
                       </a:r>
                     </a:p>
                   </a:txBody>
@@ -3653,7 +3653,7 @@
                         <a:rPr sz="900">
                           <a:latin typeface="Segoe UI"/>
                         </a:rPr>
-                        <a:t>Fleet Subs: 121  |  Binds: 10</a:t>
+                        <a:t>Fleet Subs: 122  |  Binds: 10</a:t>
                       </a:r>
                     </a:p>
                   </a:txBody>
@@ -3690,7 +3690,7 @@
                         <a:rPr sz="900">
                           <a:latin typeface="Segoe UI"/>
                         </a:rPr>
-                        <a:t>Fleet Bound Premium: $961,071.85</a:t>
+                        <a:t>Fleet Bound Premium: $962,979.89</a:t>
                       </a:r>
                     </a:p>
                   </a:txBody>
@@ -3727,7 +3727,7 @@
                         <a:rPr sz="900">
                           <a:latin typeface="Segoe UI"/>
                         </a:rPr>
-                        <a:t>Fleet Book %: 27.5%</a:t>
+                        <a:t>Fleet Book %: 27.3%</a:t>
                       </a:r>
                     </a:p>
                   </a:txBody>
@@ -3766,7 +3766,7 @@
                         <a:rPr sz="900">
                           <a:latin typeface="Segoe UI"/>
                         </a:rPr>
-                        <a:t>Non-Fleet Subs: 2147  |  Binds: 133</a:t>
+                        <a:t>Non-Fleet Subs: 2176  |  Binds: 135</a:t>
                       </a:r>
                     </a:p>
                   </a:txBody>
@@ -3803,7 +3803,7 @@
                         <a:rPr sz="900">
                           <a:latin typeface="Segoe UI"/>
                         </a:rPr>
-                        <a:t>Non-Fleet Bound Premium: $2,528,861.81</a:t>
+                        <a:t>Non-Fleet Bound Premium: $2,566,290.67</a:t>
                       </a:r>
                     </a:p>
                   </a:txBody>
@@ -3840,7 +3840,7 @@
                         <a:rPr sz="900">
                           <a:latin typeface="Segoe UI"/>
                         </a:rPr>
-                        <a:t>Non-Fleet Book %: 72.5%</a:t>
+                        <a:t>Non-Fleet Book %: 72.7%</a:t>
                       </a:r>
                     </a:p>
                   </a:txBody>
@@ -4311,7 +4311,7 @@
                         <a:rPr sz="800">
                           <a:latin typeface="Segoe UI"/>
                         </a:rPr>
-                        <a:t>303</a:t>
+                        <a:t>304</a:t>
                       </a:r>
                     </a:p>
                   </a:txBody>
@@ -4428,7 +4428,7 @@
                           </a:solidFill>
                           <a:latin typeface="Segoe UI"/>
                         </a:rPr>
-                        <a:t>318</a:t>
+                        <a:t>349</a:t>
                       </a:r>
                     </a:p>
                   </a:txBody>
@@ -4581,7 +4581,7 @@
                         <a:rPr sz="800">
                           <a:latin typeface="Segoe UI"/>
                         </a:rPr>
-                        <a:t>12.2%</a:t>
+                        <a:t>12.5%</a:t>
                       </a:r>
                     </a:p>
                   </a:txBody>
@@ -4707,7 +4707,7 @@
                           </a:solidFill>
                           <a:latin typeface="Segoe UI"/>
                         </a:rPr>
-                        <a:t>9.7%</a:t>
+                        <a:t>10.0%</a:t>
                       </a:r>
                     </a:p>
                   </a:txBody>
@@ -4866,7 +4866,7 @@
                         <a:rPr sz="800">
                           <a:latin typeface="Segoe UI"/>
                         </a:rPr>
-                        <a:t>37</a:t>
+                        <a:t>38</a:t>
                       </a:r>
                     </a:p>
                   </a:txBody>
@@ -4983,7 +4983,7 @@
                           </a:solidFill>
                           <a:latin typeface="Segoe UI"/>
                         </a:rPr>
-                        <a:t>31</a:t>
+                        <a:t>35</a:t>
                       </a:r>
                     </a:p>
                   </a:txBody>
@@ -5262,7 +5262,7 @@
                           </a:solidFill>
                           <a:latin typeface="Segoe UI"/>
                         </a:rPr>
-                        <a:t>$417.7K</a:t>
+                        <a:t>$457.1K</a:t>
                       </a:r>
                     </a:p>
                   </a:txBody>

--- a/generated/Tier 1 Broker Scorecards/AMC Agents LLC_Broker_Scorecard.pptx
+++ b/generated/Tier 1 Broker Scorecards/AMC Agents LLC_Broker_Scorecard.pptx
@@ -3394,7 +3394,7 @@
                         <a:rPr sz="900">
                           <a:latin typeface="Segoe UI"/>
                         </a:rPr>
-                        <a:t>Tier 1  |  6.31% / 15.00%</a:t>
+                        <a:t>Tier 1  |  6.13% / 15.00%</a:t>
                       </a:r>
                     </a:p>
                   </a:txBody>
@@ -3653,7 +3653,7 @@
                         <a:rPr sz="900">
                           <a:latin typeface="Segoe UI"/>
                         </a:rPr>
-                        <a:t>Fleet Subs: 122  |  Binds: 10</a:t>
+                        <a:t>Fleet Subs: 125  |  Binds: 10</a:t>
                       </a:r>
                     </a:p>
                   </a:txBody>
@@ -3690,7 +3690,7 @@
                         <a:rPr sz="900">
                           <a:latin typeface="Segoe UI"/>
                         </a:rPr>
-                        <a:t>Fleet Bound Premium: $962,979.89</a:t>
+                        <a:t>Fleet Bound Premium: $972,471.88</a:t>
                       </a:r>
                     </a:p>
                   </a:txBody>
@@ -3727,7 +3727,7 @@
                         <a:rPr sz="900">
                           <a:latin typeface="Segoe UI"/>
                         </a:rPr>
-                        <a:t>Fleet Book %: 27.3%</a:t>
+                        <a:t>Fleet Book %: 27.6%</a:t>
                       </a:r>
                     </a:p>
                   </a:txBody>
@@ -3766,7 +3766,7 @@
                         <a:rPr sz="900">
                           <a:latin typeface="Segoe UI"/>
                         </a:rPr>
-                        <a:t>Non-Fleet Subs: 2176  |  Binds: 135</a:t>
+                        <a:t>Non-Fleet Subs: 2209  |  Binds: 133</a:t>
                       </a:r>
                     </a:p>
                   </a:txBody>
@@ -3803,7 +3803,7 @@
                         <a:rPr sz="900">
                           <a:latin typeface="Segoe UI"/>
                         </a:rPr>
-                        <a:t>Non-Fleet Bound Premium: $2,566,290.67</a:t>
+                        <a:t>Non-Fleet Bound Premium: $2,556,798.68</a:t>
                       </a:r>
                     </a:p>
                   </a:txBody>
@@ -3840,7 +3840,7 @@
                         <a:rPr sz="900">
                           <a:latin typeface="Segoe UI"/>
                         </a:rPr>
-                        <a:t>Non-Fleet Book %: 72.7%</a:t>
+                        <a:t>Non-Fleet Book %: 72.4%</a:t>
                       </a:r>
                     </a:p>
                   </a:txBody>
@@ -4428,7 +4428,7 @@
                           </a:solidFill>
                           <a:latin typeface="Segoe UI"/>
                         </a:rPr>
-                        <a:t>349</a:t>
+                        <a:t>388</a:t>
                       </a:r>
                     </a:p>
                   </a:txBody>
@@ -4624,7 +4624,7 @@
                           </a:solidFill>
                           <a:latin typeface="Segoe UI"/>
                         </a:rPr>
-                        <a:t>10.0%</a:t>
+                        <a:t>9.6%</a:t>
                       </a:r>
                     </a:p>
                   </a:txBody>
@@ -4707,7 +4707,7 @@
                           </a:solidFill>
                           <a:latin typeface="Segoe UI"/>
                         </a:rPr>
-                        <a:t>10.0%</a:t>
+                        <a:t>8.8%</a:t>
                       </a:r>
                     </a:p>
                   </a:txBody>
@@ -4747,7 +4747,7 @@
                         <a:rPr sz="800">
                           <a:latin typeface="Segoe UI"/>
                         </a:rPr>
-                        <a:t>12.9%</a:t>
+                        <a:t>13.2%</a:t>
                       </a:r>
                     </a:p>
                   </a:txBody>
@@ -4906,7 +4906,7 @@
                           </a:solidFill>
                           <a:latin typeface="Segoe UI"/>
                         </a:rPr>
-                        <a:t>58</a:t>
+                        <a:t>56</a:t>
                       </a:r>
                     </a:p>
                   </a:txBody>
@@ -4983,7 +4983,7 @@
                           </a:solidFill>
                           <a:latin typeface="Segoe UI"/>
                         </a:rPr>
-                        <a:t>35</a:t>
+                        <a:t>34</a:t>
                       </a:r>
                     </a:p>
                   </a:txBody>
@@ -5020,7 +5020,7 @@
                         <a:rPr sz="800">
                           <a:latin typeface="Segoe UI"/>
                         </a:rPr>
-                        <a:t>53</a:t>
+                        <a:t>54</a:t>
                       </a:r>
                     </a:p>
                   </a:txBody>

--- a/generated/Tier 1 Broker Scorecards/AMC Agents LLC_Broker_Scorecard.pptx
+++ b/generated/Tier 1 Broker Scorecards/AMC Agents LLC_Broker_Scorecard.pptx
@@ -3357,7 +3357,7 @@
                         <a:rPr sz="800">
                           <a:latin typeface="Segoe UI"/>
                         </a:rPr>
-                        <a:t>$5,217,115.34 / $7,411,686.83 / $3,529,270.56</a:t>
+                        <a:t>$5,217,115.34 / $7,427,685.87 / $3,545,269.60</a:t>
                       </a:r>
                     </a:p>
                   </a:txBody>
@@ -3394,7 +3394,7 @@
                         <a:rPr sz="900">
                           <a:latin typeface="Segoe UI"/>
                         </a:rPr>
-                        <a:t>Tier 1  |  6.13% / 15.00%</a:t>
+                        <a:t>Tier 1  |  6.17% / 15.00%</a:t>
                       </a:r>
                     </a:p>
                   </a:txBody>
@@ -3431,7 +3431,7 @@
                         <a:rPr sz="900">
                           <a:latin typeface="Segoe UI"/>
                         </a:rPr>
-                        <a:t>$7,303,961.48  (48.3% achieved)</a:t>
+                        <a:t>$7,303,961.48  (48.5% achieved)</a:t>
                       </a:r>
                     </a:p>
                   </a:txBody>
@@ -3653,7 +3653,7 @@
                         <a:rPr sz="900">
                           <a:latin typeface="Segoe UI"/>
                         </a:rPr>
-                        <a:t>Fleet Subs: 125  |  Binds: 10</a:t>
+                        <a:t>Fleet Subs: 126  |  Binds: 10</a:t>
                       </a:r>
                     </a:p>
                   </a:txBody>
@@ -3690,7 +3690,7 @@
                         <a:rPr sz="900">
                           <a:latin typeface="Segoe UI"/>
                         </a:rPr>
-                        <a:t>Fleet Bound Premium: $972,471.88</a:t>
+                        <a:t>Fleet Bound Premium: $966,401.84</a:t>
                       </a:r>
                     </a:p>
                   </a:txBody>
@@ -3727,7 +3727,7 @@
                         <a:rPr sz="900">
                           <a:latin typeface="Segoe UI"/>
                         </a:rPr>
-                        <a:t>Fleet Book %: 27.6%</a:t>
+                        <a:t>Fleet Book %: 27.3%</a:t>
                       </a:r>
                     </a:p>
                   </a:txBody>
@@ -3766,7 +3766,7 @@
                         <a:rPr sz="900">
                           <a:latin typeface="Segoe UI"/>
                         </a:rPr>
-                        <a:t>Non-Fleet Subs: 2209  |  Binds: 133</a:t>
+                        <a:t>Non-Fleet Subs: 2239  |  Binds: 136</a:t>
                       </a:r>
                     </a:p>
                   </a:txBody>
@@ -3803,7 +3803,7 @@
                         <a:rPr sz="900">
                           <a:latin typeface="Segoe UI"/>
                         </a:rPr>
-                        <a:t>Non-Fleet Bound Premium: $2,556,798.68</a:t>
+                        <a:t>Non-Fleet Bound Premium: $2,578,867.76</a:t>
                       </a:r>
                     </a:p>
                   </a:txBody>
@@ -3840,7 +3840,7 @@
                         <a:rPr sz="900">
                           <a:latin typeface="Segoe UI"/>
                         </a:rPr>
-                        <a:t>Non-Fleet Book %: 72.4%</a:t>
+                        <a:t>Non-Fleet Book %: 72.7%</a:t>
                       </a:r>
                     </a:p>
                   </a:txBody>
@@ -4428,7 +4428,7 @@
                           </a:solidFill>
                           <a:latin typeface="Segoe UI"/>
                         </a:rPr>
-                        <a:t>388</a:t>
+                        <a:t>421</a:t>
                       </a:r>
                     </a:p>
                   </a:txBody>
@@ -4707,7 +4707,7 @@
                           </a:solidFill>
                           <a:latin typeface="Segoe UI"/>
                         </a:rPr>
-                        <a:t>8.8%</a:t>
+                        <a:t>9.5%</a:t>
                       </a:r>
                     </a:p>
                   </a:txBody>
@@ -4747,7 +4747,7 @@
                         <a:rPr sz="800">
                           <a:latin typeface="Segoe UI"/>
                         </a:rPr>
-                        <a:t>13.2%</a:t>
+                        <a:t>12.7%</a:t>
                       </a:r>
                     </a:p>
                   </a:txBody>
@@ -4983,7 +4983,7 @@
                           </a:solidFill>
                           <a:latin typeface="Segoe UI"/>
                         </a:rPr>
-                        <a:t>34</a:t>
+                        <a:t>40</a:t>
                       </a:r>
                     </a:p>
                   </a:txBody>
@@ -5020,7 +5020,7 @@
                         <a:rPr sz="800">
                           <a:latin typeface="Segoe UI"/>
                         </a:rPr>
-                        <a:t>54</a:t>
+                        <a:t>52</a:t>
                       </a:r>
                     </a:p>
                   </a:txBody>
@@ -5262,7 +5262,7 @@
                           </a:solidFill>
                           <a:latin typeface="Segoe UI"/>
                         </a:rPr>
-                        <a:t>$457.1K</a:t>
+                        <a:t>$473.1K</a:t>
                       </a:r>
                     </a:p>
                   </a:txBody>

--- a/generated/Tier 1 Broker Scorecards/AMC Agents LLC_Broker_Scorecard.pptx
+++ b/generated/Tier 1 Broker Scorecards/AMC Agents LLC_Broker_Scorecard.pptx
@@ -3357,7 +3357,7 @@
                         <a:rPr sz="800">
                           <a:latin typeface="Segoe UI"/>
                         </a:rPr>
-                        <a:t>$5,217,115.34 / $7,427,685.87 / $3,545,269.60</a:t>
+                        <a:t>$5,217,115.34 / $7,425,731.02 / $3,543,314.75</a:t>
                       </a:r>
                     </a:p>
                   </a:txBody>
@@ -3394,7 +3394,7 @@
                         <a:rPr sz="900">
                           <a:latin typeface="Segoe UI"/>
                         </a:rPr>
-                        <a:t>Tier 1  |  6.17% / 15.00%</a:t>
+                        <a:t>Tier 1  |  6.16% / 15.00%</a:t>
                       </a:r>
                     </a:p>
                   </a:txBody>
@@ -3690,7 +3690,7 @@
                         <a:rPr sz="900">
                           <a:latin typeface="Segoe UI"/>
                         </a:rPr>
-                        <a:t>Fleet Bound Premium: $966,401.84</a:t>
+                        <a:t>Fleet Bound Premium: $960,295.47</a:t>
                       </a:r>
                     </a:p>
                   </a:txBody>
@@ -3727,7 +3727,7 @@
                         <a:rPr sz="900">
                           <a:latin typeface="Segoe UI"/>
                         </a:rPr>
-                        <a:t>Fleet Book %: 27.3%</a:t>
+                        <a:t>Fleet Book %: 27.1%</a:t>
                       </a:r>
                     </a:p>
                   </a:txBody>
@@ -3766,7 +3766,7 @@
                         <a:rPr sz="900">
                           <a:latin typeface="Segoe UI"/>
                         </a:rPr>
-                        <a:t>Non-Fleet Subs: 2239  |  Binds: 136</a:t>
+                        <a:t>Non-Fleet Subs: 2262  |  Binds: 137</a:t>
                       </a:r>
                     </a:p>
                   </a:txBody>
@@ -3803,7 +3803,7 @@
                         <a:rPr sz="900">
                           <a:latin typeface="Segoe UI"/>
                         </a:rPr>
-                        <a:t>Non-Fleet Bound Premium: $2,578,867.76</a:t>
+                        <a:t>Non-Fleet Bound Premium: $2,583,019.28</a:t>
                       </a:r>
                     </a:p>
                   </a:txBody>
@@ -3840,7 +3840,7 @@
                         <a:rPr sz="900">
                           <a:latin typeface="Segoe UI"/>
                         </a:rPr>
-                        <a:t>Non-Fleet Book %: 72.7%</a:t>
+                        <a:t>Non-Fleet Book %: 72.9%</a:t>
                       </a:r>
                     </a:p>
                   </a:txBody>
@@ -4428,7 +4428,7 @@
                           </a:solidFill>
                           <a:latin typeface="Segoe UI"/>
                         </a:rPr>
-                        <a:t>421</a:t>
+                        <a:t>445</a:t>
                       </a:r>
                     </a:p>
                   </a:txBody>
@@ -4707,7 +4707,7 @@
                           </a:solidFill>
                           <a:latin typeface="Segoe UI"/>
                         </a:rPr>
-                        <a:t>9.5%</a:t>
+                        <a:t>9.0%</a:t>
                       </a:r>
                     </a:p>
                   </a:txBody>
@@ -4747,7 +4747,7 @@
                         <a:rPr sz="800">
                           <a:latin typeface="Segoe UI"/>
                         </a:rPr>
-                        <a:t>12.7%</a:t>
+                        <a:t>12.9%</a:t>
                       </a:r>
                     </a:p>
                   </a:txBody>
@@ -5020,7 +5020,7 @@
                         <a:rPr sz="800">
                           <a:latin typeface="Segoe UI"/>
                         </a:rPr>
-                        <a:t>52</a:t>
+                        <a:t>53</a:t>
                       </a:r>
                     </a:p>
                   </a:txBody>
@@ -5262,7 +5262,7 @@
                           </a:solidFill>
                           <a:latin typeface="Segoe UI"/>
                         </a:rPr>
-                        <a:t>$473.1K</a:t>
+                        <a:t>$471.1K</a:t>
                       </a:r>
                     </a:p>
                   </a:txBody>

--- a/generated/Tier 1 Broker Scorecards/AMC Agents LLC_Broker_Scorecard.pptx
+++ b/generated/Tier 1 Broker Scorecards/AMC Agents LLC_Broker_Scorecard.pptx
@@ -3357,7 +3357,7 @@
                         <a:rPr sz="800">
                           <a:latin typeface="Segoe UI"/>
                         </a:rPr>
-                        <a:t>$5,217,115.34 / $7,425,731.02 / $3,543,314.75</a:t>
+                        <a:t>$5,217,115.34 / $7,509,359.90 / $3,626,943.63</a:t>
                       </a:r>
                     </a:p>
                   </a:txBody>
@@ -3394,7 +3394,7 @@
                         <a:rPr sz="900">
                           <a:latin typeface="Segoe UI"/>
                         </a:rPr>
-                        <a:t>Tier 1  |  6.16% / 15.00%</a:t>
+                        <a:t>Tier 1  |  6.36% / 15.00%</a:t>
                       </a:r>
                     </a:p>
                   </a:txBody>
@@ -3431,7 +3431,7 @@
                         <a:rPr sz="900">
                           <a:latin typeface="Segoe UI"/>
                         </a:rPr>
-                        <a:t>$7,303,961.48  (48.5% achieved)</a:t>
+                        <a:t>$7,303,961.48  (49.7% achieved)</a:t>
                       </a:r>
                     </a:p>
                   </a:txBody>
@@ -3690,7 +3690,7 @@
                         <a:rPr sz="900">
                           <a:latin typeface="Segoe UI"/>
                         </a:rPr>
-                        <a:t>Fleet Bound Premium: $960,295.47</a:t>
+                        <a:t>Fleet Bound Premium: $935,136.82</a:t>
                       </a:r>
                     </a:p>
                   </a:txBody>
@@ -3727,7 +3727,7 @@
                         <a:rPr sz="900">
                           <a:latin typeface="Segoe UI"/>
                         </a:rPr>
-                        <a:t>Fleet Book %: 27.1%</a:t>
+                        <a:t>Fleet Book %: 25.8%</a:t>
                       </a:r>
                     </a:p>
                   </a:txBody>
@@ -3766,7 +3766,7 @@
                         <a:rPr sz="900">
                           <a:latin typeface="Segoe UI"/>
                         </a:rPr>
-                        <a:t>Non-Fleet Subs: 2262  |  Binds: 137</a:t>
+                        <a:t>Non-Fleet Subs: 2278  |  Binds: 143</a:t>
                       </a:r>
                     </a:p>
                   </a:txBody>
@@ -3803,7 +3803,7 @@
                         <a:rPr sz="900">
                           <a:latin typeface="Segoe UI"/>
                         </a:rPr>
-                        <a:t>Non-Fleet Bound Premium: $2,583,019.28</a:t>
+                        <a:t>Non-Fleet Bound Premium: $2,691,806.81</a:t>
                       </a:r>
                     </a:p>
                   </a:txBody>
@@ -3840,7 +3840,7 @@
                         <a:rPr sz="900">
                           <a:latin typeface="Segoe UI"/>
                         </a:rPr>
-                        <a:t>Non-Fleet Book %: 72.9%</a:t>
+                        <a:t>Non-Fleet Book %: 74.2%</a:t>
                       </a:r>
                     </a:p>
                   </a:txBody>
@@ -4311,7 +4311,7 @@
                         <a:rPr sz="800">
                           <a:latin typeface="Segoe UI"/>
                         </a:rPr>
-                        <a:t>304</a:t>
+                        <a:t>303</a:t>
                       </a:r>
                     </a:p>
                   </a:txBody>
@@ -4428,7 +4428,7 @@
                           </a:solidFill>
                           <a:latin typeface="Segoe UI"/>
                         </a:rPr>
-                        <a:t>445</a:t>
+                        <a:t>467</a:t>
                       </a:r>
                     </a:p>
                   </a:txBody>
@@ -4581,7 +4581,7 @@
                         <a:rPr sz="800">
                           <a:latin typeface="Segoe UI"/>
                         </a:rPr>
-                        <a:t>12.5%</a:t>
+                        <a:t>12.2%</a:t>
                       </a:r>
                     </a:p>
                   </a:txBody>
@@ -4624,7 +4624,7 @@
                           </a:solidFill>
                           <a:latin typeface="Segoe UI"/>
                         </a:rPr>
-                        <a:t>9.6%</a:t>
+                        <a:t>9.8%</a:t>
                       </a:r>
                     </a:p>
                   </a:txBody>
@@ -4707,7 +4707,7 @@
                           </a:solidFill>
                           <a:latin typeface="Segoe UI"/>
                         </a:rPr>
-                        <a:t>9.0%</a:t>
+                        <a:t>9.9%</a:t>
                       </a:r>
                     </a:p>
                   </a:txBody>
@@ -4866,7 +4866,7 @@
                         <a:rPr sz="800">
                           <a:latin typeface="Segoe UI"/>
                         </a:rPr>
-                        <a:t>38</a:t>
+                        <a:t>37</a:t>
                       </a:r>
                     </a:p>
                   </a:txBody>
@@ -4906,7 +4906,7 @@
                           </a:solidFill>
                           <a:latin typeface="Segoe UI"/>
                         </a:rPr>
-                        <a:t>56</a:t>
+                        <a:t>57</a:t>
                       </a:r>
                     </a:p>
                   </a:txBody>
@@ -4979,11 +4979,11 @@
                       <a:r>
                         <a:rPr sz="800">
                           <a:solidFill>
-                            <a:srgbClr val="DC2626"/>
+                            <a:srgbClr val="059669"/>
                           </a:solidFill>
                           <a:latin typeface="Segoe UI"/>
                         </a:rPr>
-                        <a:t>40</a:t>
+                        <a:t>46</a:t>
                       </a:r>
                     </a:p>
                   </a:txBody>
@@ -5258,11 +5258,11 @@
                       <a:r>
                         <a:rPr sz="800" b="1">
                           <a:solidFill>
-                            <a:srgbClr val="DC2626"/>
+                            <a:srgbClr val="059669"/>
                           </a:solidFill>
                           <a:latin typeface="Segoe UI"/>
                         </a:rPr>
-                        <a:t>$471.1K</a:t>
+                        <a:t>$554.8K</a:t>
                       </a:r>
                     </a:p>
                   </a:txBody>

--- a/generated/Tier 1 Broker Scorecards/AMC Agents LLC_Broker_Scorecard.pptx
+++ b/generated/Tier 1 Broker Scorecards/AMC Agents LLC_Broker_Scorecard.pptx
@@ -3394,7 +3394,7 @@
                         <a:rPr sz="900">
                           <a:latin typeface="Segoe UI"/>
                         </a:rPr>
-                        <a:t>Tier 1  |  6.36% / 15.00%</a:t>
+                        <a:t>Tier 1  |  6.23% / 15.00%</a:t>
                       </a:r>
                     </a:p>
                   </a:txBody>
@@ -3690,7 +3690,7 @@
                         <a:rPr sz="900">
                           <a:latin typeface="Segoe UI"/>
                         </a:rPr>
-                        <a:t>Fleet Bound Premium: $935,136.82</a:t>
+                        <a:t>Fleet Bound Premium: $951,210.77</a:t>
                       </a:r>
                     </a:p>
                   </a:txBody>
@@ -3727,7 +3727,7 @@
                         <a:rPr sz="900">
                           <a:latin typeface="Segoe UI"/>
                         </a:rPr>
-                        <a:t>Fleet Book %: 25.8%</a:t>
+                        <a:t>Fleet Book %: 26.2%</a:t>
                       </a:r>
                     </a:p>
                   </a:txBody>
@@ -3766,7 +3766,7 @@
                         <a:rPr sz="900">
                           <a:latin typeface="Segoe UI"/>
                         </a:rPr>
-                        <a:t>Non-Fleet Subs: 2278  |  Binds: 143</a:t>
+                        <a:t>Non-Fleet Subs: 2280  |  Binds: 140</a:t>
                       </a:r>
                     </a:p>
                   </a:txBody>
@@ -3803,7 +3803,7 @@
                         <a:rPr sz="900">
                           <a:latin typeface="Segoe UI"/>
                         </a:rPr>
-                        <a:t>Non-Fleet Bound Premium: $2,691,806.81</a:t>
+                        <a:t>Non-Fleet Bound Premium: $2,675,732.86</a:t>
                       </a:r>
                     </a:p>
                   </a:txBody>
@@ -3840,7 +3840,7 @@
                         <a:rPr sz="900">
                           <a:latin typeface="Segoe UI"/>
                         </a:rPr>
-                        <a:t>Non-Fleet Book %: 74.2%</a:t>
+                        <a:t>Non-Fleet Book %: 73.8%</a:t>
                       </a:r>
                     </a:p>
                   </a:txBody>
@@ -4311,7 +4311,7 @@
                         <a:rPr sz="800">
                           <a:latin typeface="Segoe UI"/>
                         </a:rPr>
-                        <a:t>303</a:t>
+                        <a:t>304</a:t>
                       </a:r>
                     </a:p>
                   </a:txBody>
@@ -4428,7 +4428,7 @@
                           </a:solidFill>
                           <a:latin typeface="Segoe UI"/>
                         </a:rPr>
-                        <a:t>467</a:t>
+                        <a:t>469</a:t>
                       </a:r>
                     </a:p>
                   </a:txBody>
@@ -4581,7 +4581,90 @@
                         <a:rPr sz="800">
                           <a:latin typeface="Segoe UI"/>
                         </a:rPr>
-                        <a:t>12.2%</a:t>
+                        <a:t>12.5%</a:t>
+                      </a:r>
+                    </a:p>
+                  </a:txBody>
+                  <a:tcPr marL="114300" marR="91425" marT="45700" marB="45700">
+                    <a:solidFill>
+                      <a:srgbClr val="F5F3FF"/>
+                    </a:solidFill>
+                    <a:lnL w="6350" cap="flat" cmpd="sng">
+                      <a:solidFill>
+                        <a:srgbClr val="E5E7EB"/>
+                      </a:solidFill>
+                    </a:lnL>
+                    <a:lnR w="6350" cap="flat" cmpd="sng">
+                      <a:solidFill>
+                        <a:srgbClr val="E5E7EB"/>
+                      </a:solidFill>
+                    </a:lnR>
+                    <a:lnT w="6350" cap="flat" cmpd="sng">
+                      <a:solidFill>
+                        <a:srgbClr val="E5E7EB"/>
+                      </a:solidFill>
+                    </a:lnT>
+                    <a:lnB w="6350" cap="flat" cmpd="sng">
+                      <a:solidFill>
+                        <a:srgbClr val="E5E7EB"/>
+                      </a:solidFill>
+                    </a:lnB>
+                  </a:tcPr>
+                </a:tc>
+                <a:tc>
+                  <a:txBody>
+                    <a:bodyPr/>
+                    <a:lstStyle/>
+                    <a:p>
+                      <a:pPr algn="ctr"/>
+                      <a:r>
+                        <a:rPr sz="800">
+                          <a:solidFill>
+                            <a:srgbClr val="DC2626"/>
+                          </a:solidFill>
+                          <a:latin typeface="Segoe UI"/>
+                        </a:rPr>
+                        <a:t>9.6%</a:t>
+                      </a:r>
+                    </a:p>
+                  </a:txBody>
+                  <a:tcPr marL="114300" marR="91425" marT="45700" marB="45700">
+                    <a:solidFill>
+                      <a:srgbClr val="F5F3FF"/>
+                    </a:solidFill>
+                    <a:lnL w="6350" cap="flat" cmpd="sng">
+                      <a:solidFill>
+                        <a:srgbClr val="E5E7EB"/>
+                      </a:solidFill>
+                    </a:lnL>
+                    <a:lnR w="6350" cap="flat" cmpd="sng">
+                      <a:solidFill>
+                        <a:srgbClr val="E5E7EB"/>
+                      </a:solidFill>
+                    </a:lnR>
+                    <a:lnT w="6350" cap="flat" cmpd="sng">
+                      <a:solidFill>
+                        <a:srgbClr val="E5E7EB"/>
+                      </a:solidFill>
+                    </a:lnT>
+                    <a:lnB w="6350" cap="flat" cmpd="sng">
+                      <a:solidFill>
+                        <a:srgbClr val="E5E7EB"/>
+                      </a:solidFill>
+                    </a:lnB>
+                  </a:tcPr>
+                </a:tc>
+                <a:tc>
+                  <a:txBody>
+                    <a:bodyPr/>
+                    <a:lstStyle/>
+                    <a:p>
+                      <a:pPr algn="ctr"/>
+                      <a:r>
+                        <a:rPr sz="800">
+                          <a:latin typeface="Segoe UI"/>
+                        </a:rPr>
+                        <a:t>14.5%</a:t>
                       </a:r>
                     </a:p>
                   </a:txBody>
@@ -4664,89 +4747,6 @@
                         <a:rPr sz="800">
                           <a:latin typeface="Segoe UI"/>
                         </a:rPr>
-                        <a:t>14.5%</a:t>
-                      </a:r>
-                    </a:p>
-                  </a:txBody>
-                  <a:tcPr marL="114300" marR="91425" marT="45700" marB="45700">
-                    <a:solidFill>
-                      <a:srgbClr val="F5F3FF"/>
-                    </a:solidFill>
-                    <a:lnL w="6350" cap="flat" cmpd="sng">
-                      <a:solidFill>
-                        <a:srgbClr val="E5E7EB"/>
-                      </a:solidFill>
-                    </a:lnL>
-                    <a:lnR w="6350" cap="flat" cmpd="sng">
-                      <a:solidFill>
-                        <a:srgbClr val="E5E7EB"/>
-                      </a:solidFill>
-                    </a:lnR>
-                    <a:lnT w="6350" cap="flat" cmpd="sng">
-                      <a:solidFill>
-                        <a:srgbClr val="E5E7EB"/>
-                      </a:solidFill>
-                    </a:lnT>
-                    <a:lnB w="6350" cap="flat" cmpd="sng">
-                      <a:solidFill>
-                        <a:srgbClr val="E5E7EB"/>
-                      </a:solidFill>
-                    </a:lnB>
-                  </a:tcPr>
-                </a:tc>
-                <a:tc>
-                  <a:txBody>
-                    <a:bodyPr/>
-                    <a:lstStyle/>
-                    <a:p>
-                      <a:pPr algn="ctr"/>
-                      <a:r>
-                        <a:rPr sz="800">
-                          <a:solidFill>
-                            <a:srgbClr val="DC2626"/>
-                          </a:solidFill>
-                          <a:latin typeface="Segoe UI"/>
-                        </a:rPr>
-                        <a:t>9.9%</a:t>
-                      </a:r>
-                    </a:p>
-                  </a:txBody>
-                  <a:tcPr marL="114300" marR="91425" marT="45700" marB="45700">
-                    <a:solidFill>
-                      <a:srgbClr val="F5F3FF"/>
-                    </a:solidFill>
-                    <a:lnL w="6350" cap="flat" cmpd="sng">
-                      <a:solidFill>
-                        <a:srgbClr val="E5E7EB"/>
-                      </a:solidFill>
-                    </a:lnL>
-                    <a:lnR w="6350" cap="flat" cmpd="sng">
-                      <a:solidFill>
-                        <a:srgbClr val="E5E7EB"/>
-                      </a:solidFill>
-                    </a:lnR>
-                    <a:lnT w="6350" cap="flat" cmpd="sng">
-                      <a:solidFill>
-                        <a:srgbClr val="E5E7EB"/>
-                      </a:solidFill>
-                    </a:lnT>
-                    <a:lnB w="6350" cap="flat" cmpd="sng">
-                      <a:solidFill>
-                        <a:srgbClr val="E5E7EB"/>
-                      </a:solidFill>
-                    </a:lnB>
-                  </a:tcPr>
-                </a:tc>
-                <a:tc>
-                  <a:txBody>
-                    <a:bodyPr/>
-                    <a:lstStyle/>
-                    <a:p>
-                      <a:pPr algn="ctr"/>
-                      <a:r>
-                        <a:rPr sz="800">
-                          <a:latin typeface="Segoe UI"/>
-                        </a:rPr>
                         <a:t>12.9%</a:t>
                       </a:r>
                     </a:p>
@@ -4866,7 +4866,7 @@
                         <a:rPr sz="800">
                           <a:latin typeface="Segoe UI"/>
                         </a:rPr>
-                        <a:t>37</a:t>
+                        <a:t>38</a:t>
                       </a:r>
                     </a:p>
                   </a:txBody>
@@ -4906,7 +4906,7 @@
                           </a:solidFill>
                           <a:latin typeface="Segoe UI"/>
                         </a:rPr>
-                        <a:t>57</a:t>
+                        <a:t>56</a:t>
                       </a:r>
                     </a:p>
                   </a:txBody>

--- a/generated/Tier 1 Broker Scorecards/AMC Agents LLC_Broker_Scorecard.pptx
+++ b/generated/Tier 1 Broker Scorecards/AMC Agents LLC_Broker_Scorecard.pptx
@@ -3653,7 +3653,7 @@
                         <a:rPr sz="900">
                           <a:latin typeface="Segoe UI"/>
                         </a:rPr>
-                        <a:t>Fleet Subs: 126  |  Binds: 10</a:t>
+                        <a:t>Fleet Subs: 127  |  Binds: 10</a:t>
                       </a:r>
                     </a:p>
                   </a:txBody>
@@ -3690,7 +3690,7 @@
                         <a:rPr sz="900">
                           <a:latin typeface="Segoe UI"/>
                         </a:rPr>
-                        <a:t>Fleet Bound Premium: $951,210.77</a:t>
+                        <a:t>Fleet Bound Premium: $954,877.96</a:t>
                       </a:r>
                     </a:p>
                   </a:txBody>
@@ -3727,7 +3727,7 @@
                         <a:rPr sz="900">
                           <a:latin typeface="Segoe UI"/>
                         </a:rPr>
-                        <a:t>Fleet Book %: 26.2%</a:t>
+                        <a:t>Fleet Book %: 26.3%</a:t>
                       </a:r>
                     </a:p>
                   </a:txBody>
@@ -3803,7 +3803,7 @@
                         <a:rPr sz="900">
                           <a:latin typeface="Segoe UI"/>
                         </a:rPr>
-                        <a:t>Non-Fleet Bound Premium: $2,675,732.86</a:t>
+                        <a:t>Non-Fleet Bound Premium: $2,672,065.67</a:t>
                       </a:r>
                     </a:p>
                   </a:txBody>
@@ -3840,7 +3840,7 @@
                         <a:rPr sz="900">
                           <a:latin typeface="Segoe UI"/>
                         </a:rPr>
-                        <a:t>Non-Fleet Book %: 73.8%</a:t>
+                        <a:t>Non-Fleet Book %: 73.7%</a:t>
                       </a:r>
                     </a:p>
                   </a:txBody>
@@ -4311,7 +4311,7 @@
                         <a:rPr sz="800">
                           <a:latin typeface="Segoe UI"/>
                         </a:rPr>
-                        <a:t>304</a:t>
+                        <a:t>303</a:t>
                       </a:r>
                     </a:p>
                   </a:txBody>
@@ -4428,7 +4428,7 @@
                           </a:solidFill>
                           <a:latin typeface="Segoe UI"/>
                         </a:rPr>
-                        <a:t>469</a:t>
+                        <a:t>470</a:t>
                       </a:r>
                     </a:p>
                   </a:txBody>
@@ -4581,7 +4581,7 @@
                         <a:rPr sz="800">
                           <a:latin typeface="Segoe UI"/>
                         </a:rPr>
-                        <a:t>12.5%</a:t>
+                        <a:t>12.2%</a:t>
                       </a:r>
                     </a:p>
                   </a:txBody>
@@ -4866,7 +4866,7 @@
                         <a:rPr sz="800">
                           <a:latin typeface="Segoe UI"/>
                         </a:rPr>
-                        <a:t>38</a:t>
+                        <a:t>37</a:t>
                       </a:r>
                     </a:p>
                   </a:txBody>

--- a/generated/Tier 1 Broker Scorecards/AMC Agents LLC_Broker_Scorecard.pptx
+++ b/generated/Tier 1 Broker Scorecards/AMC Agents LLC_Broker_Scorecard.pptx
@@ -3690,7 +3690,7 @@
                         <a:rPr sz="900">
                           <a:latin typeface="Segoe UI"/>
                         </a:rPr>
-                        <a:t>Fleet Bound Premium: $954,877.96</a:t>
+                        <a:t>Fleet Bound Premium: $959,940.38</a:t>
                       </a:r>
                     </a:p>
                   </a:txBody>
@@ -3727,7 +3727,7 @@
                         <a:rPr sz="900">
                           <a:latin typeface="Segoe UI"/>
                         </a:rPr>
-                        <a:t>Fleet Book %: 26.3%</a:t>
+                        <a:t>Fleet Book %: 26.5%</a:t>
                       </a:r>
                     </a:p>
                   </a:txBody>
@@ -3803,7 +3803,7 @@
                         <a:rPr sz="900">
                           <a:latin typeface="Segoe UI"/>
                         </a:rPr>
-                        <a:t>Non-Fleet Bound Premium: $2,672,065.67</a:t>
+                        <a:t>Non-Fleet Bound Premium: $2,667,003.25</a:t>
                       </a:r>
                     </a:p>
                   </a:txBody>
@@ -3840,7 +3840,7 @@
                         <a:rPr sz="900">
                           <a:latin typeface="Segoe UI"/>
                         </a:rPr>
-                        <a:t>Non-Fleet Book %: 73.7%</a:t>
+                        <a:t>Non-Fleet Book %: 73.5%</a:t>
                       </a:r>
                     </a:p>
                   </a:txBody>
@@ -4311,7 +4311,7 @@
                         <a:rPr sz="800">
                           <a:latin typeface="Segoe UI"/>
                         </a:rPr>
-                        <a:t>303</a:t>
+                        <a:t>304</a:t>
                       </a:r>
                     </a:p>
                   </a:txBody>
@@ -4581,7 +4581,7 @@
                         <a:rPr sz="800">
                           <a:latin typeface="Segoe UI"/>
                         </a:rPr>
-                        <a:t>12.2%</a:t>
+                        <a:t>12.5%</a:t>
                       </a:r>
                     </a:p>
                   </a:txBody>
@@ -4747,7 +4747,7 @@
                         <a:rPr sz="800">
                           <a:latin typeface="Segoe UI"/>
                         </a:rPr>
-                        <a:t>12.9%</a:t>
+                        <a:t>13.2%</a:t>
                       </a:r>
                     </a:p>
                   </a:txBody>
@@ -4866,7 +4866,7 @@
                         <a:rPr sz="800">
                           <a:latin typeface="Segoe UI"/>
                         </a:rPr>
-                        <a:t>37</a:t>
+                        <a:t>38</a:t>
                       </a:r>
                     </a:p>
                   </a:txBody>
@@ -5020,7 +5020,7 @@
                         <a:rPr sz="800">
                           <a:latin typeface="Segoe UI"/>
                         </a:rPr>
-                        <a:t>53</a:t>
+                        <a:t>54</a:t>
                       </a:r>
                     </a:p>
                   </a:txBody>

--- a/generated/Tier 1 Broker Scorecards/AMC Agents LLC_Broker_Scorecard.pptx
+++ b/generated/Tier 1 Broker Scorecards/AMC Agents LLC_Broker_Scorecard.pptx
@@ -3357,7 +3357,7 @@
                         <a:rPr sz="800">
                           <a:latin typeface="Segoe UI"/>
                         </a:rPr>
-                        <a:t>$5,217,115.34 / $7,509,359.90 / $3,626,943.63</a:t>
+                        <a:t>$5,217,115.34 / $7,521,824.05 / $3,639,407.78</a:t>
                       </a:r>
                     </a:p>
                   </a:txBody>
@@ -3394,7 +3394,7 @@
                         <a:rPr sz="900">
                           <a:latin typeface="Segoe UI"/>
                         </a:rPr>
-                        <a:t>Tier 1  |  6.23% / 15.00%</a:t>
+                        <a:t>Tier 1  |  6.13% / 15.00%</a:t>
                       </a:r>
                     </a:p>
                   </a:txBody>
@@ -3431,7 +3431,7 @@
                         <a:rPr sz="900">
                           <a:latin typeface="Segoe UI"/>
                         </a:rPr>
-                        <a:t>$7,303,961.48  (49.7% achieved)</a:t>
+                        <a:t>$7,303,961.48  (49.8% achieved)</a:t>
                       </a:r>
                     </a:p>
                   </a:txBody>
@@ -3653,7 +3653,7 @@
                         <a:rPr sz="900">
                           <a:latin typeface="Segoe UI"/>
                         </a:rPr>
-                        <a:t>Fleet Subs: 127  |  Binds: 10</a:t>
+                        <a:t>Fleet Subs: 129  |  Binds: 10</a:t>
                       </a:r>
                     </a:p>
                   </a:txBody>
@@ -3690,7 +3690,7 @@
                         <a:rPr sz="900">
                           <a:latin typeface="Segoe UI"/>
                         </a:rPr>
-                        <a:t>Fleet Bound Premium: $959,940.38</a:t>
+                        <a:t>Fleet Bound Premium: $953,435.72</a:t>
                       </a:r>
                     </a:p>
                   </a:txBody>
@@ -3727,7 +3727,7 @@
                         <a:rPr sz="900">
                           <a:latin typeface="Segoe UI"/>
                         </a:rPr>
-                        <a:t>Fleet Book %: 26.5%</a:t>
+                        <a:t>Fleet Book %: 26.2%</a:t>
                       </a:r>
                     </a:p>
                   </a:txBody>
@@ -3766,7 +3766,7 @@
                         <a:rPr sz="900">
                           <a:latin typeface="Segoe UI"/>
                         </a:rPr>
-                        <a:t>Non-Fleet Subs: 2280  |  Binds: 140</a:t>
+                        <a:t>Non-Fleet Subs: 2302  |  Binds: 139</a:t>
                       </a:r>
                     </a:p>
                   </a:txBody>
@@ -3803,7 +3803,7 @@
                         <a:rPr sz="900">
                           <a:latin typeface="Segoe UI"/>
                         </a:rPr>
-                        <a:t>Non-Fleet Bound Premium: $2,667,003.25</a:t>
+                        <a:t>Non-Fleet Bound Premium: $2,685,972.06</a:t>
                       </a:r>
                     </a:p>
                   </a:txBody>
@@ -3840,7 +3840,7 @@
                         <a:rPr sz="900">
                           <a:latin typeface="Segoe UI"/>
                         </a:rPr>
-                        <a:t>Non-Fleet Book %: 73.5%</a:t>
+                        <a:t>Non-Fleet Book %: 73.8%</a:t>
                       </a:r>
                     </a:p>
                   </a:txBody>
@@ -4311,7 +4311,7 @@
                         <a:rPr sz="800">
                           <a:latin typeface="Segoe UI"/>
                         </a:rPr>
-                        <a:t>304</a:t>
+                        <a:t>303</a:t>
                       </a:r>
                     </a:p>
                   </a:txBody>
@@ -4428,7 +4428,7 @@
                           </a:solidFill>
                           <a:latin typeface="Segoe UI"/>
                         </a:rPr>
-                        <a:t>470</a:t>
+                        <a:t>495</a:t>
                       </a:r>
                     </a:p>
                   </a:txBody>
@@ -4581,7 +4581,7 @@
                         <a:rPr sz="800">
                           <a:latin typeface="Segoe UI"/>
                         </a:rPr>
-                        <a:t>12.5%</a:t>
+                        <a:t>12.2%</a:t>
                       </a:r>
                     </a:p>
                   </a:txBody>
@@ -4707,7 +4707,7 @@
                           </a:solidFill>
                           <a:latin typeface="Segoe UI"/>
                         </a:rPr>
-                        <a:t>9.8%</a:t>
+                        <a:t>9.3%</a:t>
                       </a:r>
                     </a:p>
                   </a:txBody>
@@ -4866,7 +4866,7 @@
                         <a:rPr sz="800">
                           <a:latin typeface="Segoe UI"/>
                         </a:rPr>
-                        <a:t>38</a:t>
+                        <a:t>37</a:t>
                       </a:r>
                     </a:p>
                   </a:txBody>
@@ -5262,7 +5262,7 @@
                           </a:solidFill>
                           <a:latin typeface="Segoe UI"/>
                         </a:rPr>
-                        <a:t>$554.8K</a:t>
+                        <a:t>$567.2K</a:t>
                       </a:r>
                     </a:p>
                   </a:txBody>

--- a/generated/Tier 1 Broker Scorecards/AMC Agents LLC_Broker_Scorecard.pptx
+++ b/generated/Tier 1 Broker Scorecards/AMC Agents LLC_Broker_Scorecard.pptx
@@ -3357,7 +3357,7 @@
                         <a:rPr sz="800">
                           <a:latin typeface="Segoe UI"/>
                         </a:rPr>
-                        <a:t>$5,217,115.34 / $7,521,824.05 / $3,639,407.78</a:t>
+                        <a:t>$5,217,115.34 / $7,567,478.61 / $3,685,062.34</a:t>
                       </a:r>
                     </a:p>
                   </a:txBody>
@@ -3394,7 +3394,7 @@
                         <a:rPr sz="900">
                           <a:latin typeface="Segoe UI"/>
                         </a:rPr>
-                        <a:t>Tier 1  |  6.13% / 15.00%</a:t>
+                        <a:t>Tier 1  |  6.02% / 15.00%</a:t>
                       </a:r>
                     </a:p>
                   </a:txBody>
@@ -3431,7 +3431,7 @@
                         <a:rPr sz="900">
                           <a:latin typeface="Segoe UI"/>
                         </a:rPr>
-                        <a:t>$7,303,961.48  (49.8% achieved)</a:t>
+                        <a:t>$7,303,961.48  (50.5% achieved)</a:t>
                       </a:r>
                     </a:p>
                   </a:txBody>
@@ -3653,7 +3653,7 @@
                         <a:rPr sz="900">
                           <a:latin typeface="Segoe UI"/>
                         </a:rPr>
-                        <a:t>Fleet Subs: 129  |  Binds: 10</a:t>
+                        <a:t>Fleet Subs: 130  |  Binds: 9</a:t>
                       </a:r>
                     </a:p>
                   </a:txBody>
@@ -3690,7 +3690,7 @@
                         <a:rPr sz="900">
                           <a:latin typeface="Segoe UI"/>
                         </a:rPr>
-                        <a:t>Fleet Bound Premium: $953,435.72</a:t>
+                        <a:t>Fleet Bound Premium: $878,719.26</a:t>
                       </a:r>
                     </a:p>
                   </a:txBody>
@@ -3727,7 +3727,7 @@
                         <a:rPr sz="900">
                           <a:latin typeface="Segoe UI"/>
                         </a:rPr>
-                        <a:t>Fleet Book %: 26.2%</a:t>
+                        <a:t>Fleet Book %: 23.8%</a:t>
                       </a:r>
                     </a:p>
                   </a:txBody>
@@ -3766,7 +3766,7 @@
                         <a:rPr sz="900">
                           <a:latin typeface="Segoe UI"/>
                         </a:rPr>
-                        <a:t>Non-Fleet Subs: 2302  |  Binds: 139</a:t>
+                        <a:t>Non-Fleet Subs: 2346  |  Binds: 140</a:t>
                       </a:r>
                     </a:p>
                   </a:txBody>
@@ -3803,7 +3803,7 @@
                         <a:rPr sz="900">
                           <a:latin typeface="Segoe UI"/>
                         </a:rPr>
-                        <a:t>Non-Fleet Bound Premium: $2,685,972.06</a:t>
+                        <a:t>Non-Fleet Bound Premium: $2,806,343.08</a:t>
                       </a:r>
                     </a:p>
                   </a:txBody>
@@ -3840,7 +3840,7 @@
                         <a:rPr sz="900">
                           <a:latin typeface="Segoe UI"/>
                         </a:rPr>
-                        <a:t>Non-Fleet Book %: 73.8%</a:t>
+                        <a:t>Non-Fleet Book %: 76.2%</a:t>
                       </a:r>
                     </a:p>
                   </a:txBody>
@@ -4428,7 +4428,7 @@
                           </a:solidFill>
                           <a:latin typeface="Segoe UI"/>
                         </a:rPr>
-                        <a:t>495</a:t>
+                        <a:t>542</a:t>
                       </a:r>
                     </a:p>
                   </a:txBody>
@@ -4707,7 +4707,7 @@
                           </a:solidFill>
                           <a:latin typeface="Segoe UI"/>
                         </a:rPr>
-                        <a:t>9.3%</a:t>
+                        <a:t>8.9%</a:t>
                       </a:r>
                     </a:p>
                   </a:txBody>
@@ -4747,7 +4747,7 @@
                         <a:rPr sz="800">
                           <a:latin typeface="Segoe UI"/>
                         </a:rPr>
-                        <a:t>13.2%</a:t>
+                        <a:t>12.9%</a:t>
                       </a:r>
                     </a:p>
                   </a:txBody>
@@ -4983,7 +4983,7 @@
                           </a:solidFill>
                           <a:latin typeface="Segoe UI"/>
                         </a:rPr>
-                        <a:t>46</a:t>
+                        <a:t>48</a:t>
                       </a:r>
                     </a:p>
                   </a:txBody>
@@ -5020,7 +5020,7 @@
                         <a:rPr sz="800">
                           <a:latin typeface="Segoe UI"/>
                         </a:rPr>
-                        <a:t>54</a:t>
+                        <a:t>53</a:t>
                       </a:r>
                     </a:p>
                   </a:txBody>
@@ -5262,7 +5262,7 @@
                           </a:solidFill>
                           <a:latin typeface="Segoe UI"/>
                         </a:rPr>
-                        <a:t>$567.2K</a:t>
+                        <a:t>$612.9K</a:t>
                       </a:r>
                     </a:p>
                   </a:txBody>

--- a/generated/Tier 1 Broker Scorecards/AMC Agents LLC_Broker_Scorecard.pptx
+++ b/generated/Tier 1 Broker Scorecards/AMC Agents LLC_Broker_Scorecard.pptx
@@ -3357,7 +3357,7 @@
                         <a:rPr sz="800">
                           <a:latin typeface="Segoe UI"/>
                         </a:rPr>
-                        <a:t>$5,217,115.34 / $7,567,478.61 / $3,685,062.34</a:t>
+                        <a:t>$5,217,115.34 / $7,611,898.73 / $3,729,482.46</a:t>
                       </a:r>
                     </a:p>
                   </a:txBody>
@@ -3394,7 +3394,7 @@
                         <a:rPr sz="900">
                           <a:latin typeface="Segoe UI"/>
                         </a:rPr>
-                        <a:t>Tier 1  |  6.02% / 15.00%</a:t>
+                        <a:t>Tier 1  |  6.26% / 15.00%</a:t>
                       </a:r>
                     </a:p>
                   </a:txBody>
@@ -3431,7 +3431,7 @@
                         <a:rPr sz="900">
                           <a:latin typeface="Segoe UI"/>
                         </a:rPr>
-                        <a:t>$7,303,961.48  (50.5% achieved)</a:t>
+                        <a:t>$7,303,961.48  (51.1% achieved)</a:t>
                       </a:r>
                     </a:p>
                   </a:txBody>
@@ -3653,7 +3653,7 @@
                         <a:rPr sz="900">
                           <a:latin typeface="Segoe UI"/>
                         </a:rPr>
-                        <a:t>Fleet Subs: 130  |  Binds: 9</a:t>
+                        <a:t>Fleet Subs: 132  |  Binds: 10</a:t>
                       </a:r>
                     </a:p>
                   </a:txBody>
@@ -3690,7 +3690,7 @@
                         <a:rPr sz="900">
                           <a:latin typeface="Segoe UI"/>
                         </a:rPr>
-                        <a:t>Fleet Bound Premium: $878,719.26</a:t>
+                        <a:t>Fleet Bound Premium: $935,552.61</a:t>
                       </a:r>
                     </a:p>
                   </a:txBody>
@@ -3727,7 +3727,7 @@
                         <a:rPr sz="900">
                           <a:latin typeface="Segoe UI"/>
                         </a:rPr>
-                        <a:t>Fleet Book %: 23.8%</a:t>
+                        <a:t>Fleet Book %: 25.1%</a:t>
                       </a:r>
                     </a:p>
                   </a:txBody>
@@ -3766,7 +3766,7 @@
                         <a:rPr sz="900">
                           <a:latin typeface="Segoe UI"/>
                         </a:rPr>
-                        <a:t>Non-Fleet Subs: 2346  |  Binds: 140</a:t>
+                        <a:t>Non-Fleet Subs: 2377  |  Binds: 147</a:t>
                       </a:r>
                     </a:p>
                   </a:txBody>
@@ -3803,7 +3803,7 @@
                         <a:rPr sz="900">
                           <a:latin typeface="Segoe UI"/>
                         </a:rPr>
-                        <a:t>Non-Fleet Bound Premium: $2,806,343.08</a:t>
+                        <a:t>Non-Fleet Bound Premium: $2,793,929.85</a:t>
                       </a:r>
                     </a:p>
                   </a:txBody>
@@ -3840,7 +3840,7 @@
                         <a:rPr sz="900">
                           <a:latin typeface="Segoe UI"/>
                         </a:rPr>
-                        <a:t>Non-Fleet Book %: 76.2%</a:t>
+                        <a:t>Non-Fleet Book %: 74.9%</a:t>
                       </a:r>
                     </a:p>
                   </a:txBody>
@@ -4428,7 +4428,7 @@
                           </a:solidFill>
                           <a:latin typeface="Segoe UI"/>
                         </a:rPr>
-                        <a:t>542</a:t>
+                        <a:t>578</a:t>
                       </a:r>
                     </a:p>
                   </a:txBody>
@@ -4624,7 +4624,7 @@
                           </a:solidFill>
                           <a:latin typeface="Segoe UI"/>
                         </a:rPr>
-                        <a:t>9.6%</a:t>
+                        <a:t>9.8%</a:t>
                       </a:r>
                     </a:p>
                   </a:txBody>
@@ -4707,7 +4707,7 @@
                           </a:solidFill>
                           <a:latin typeface="Segoe UI"/>
                         </a:rPr>
-                        <a:t>8.9%</a:t>
+                        <a:t>9.3%</a:t>
                       </a:r>
                     </a:p>
                   </a:txBody>
@@ -4906,7 +4906,7 @@
                           </a:solidFill>
                           <a:latin typeface="Segoe UI"/>
                         </a:rPr>
-                        <a:t>56</a:t>
+                        <a:t>57</a:t>
                       </a:r>
                     </a:p>
                   </a:txBody>
@@ -4983,7 +4983,7 @@
                           </a:solidFill>
                           <a:latin typeface="Segoe UI"/>
                         </a:rPr>
-                        <a:t>48</a:t>
+                        <a:t>54</a:t>
                       </a:r>
                     </a:p>
                   </a:txBody>
@@ -5262,7 +5262,7 @@
                           </a:solidFill>
                           <a:latin typeface="Segoe UI"/>
                         </a:rPr>
-                        <a:t>$612.9K</a:t>
+                        <a:t>$657.3K</a:t>
                       </a:r>
                     </a:p>
                   </a:txBody>
@@ -5339,10 +5339,13 @@
                     <a:p>
                       <a:pPr algn="ctr"/>
                       <a:r>
-                        <a:rPr sz="800">
+                        <a:rPr sz="800" b="1">
+                          <a:solidFill>
+                            <a:srgbClr val="DC2626"/>
+                          </a:solidFill>
                           <a:latin typeface="Segoe UI"/>
                         </a:rPr>
-                        <a:t/>
+                        <a:t>$2.7K</a:t>
                       </a:r>
                     </a:p>
                   </a:txBody>

--- a/generated/Tier 1 Broker Scorecards/AMC Agents LLC_Broker_Scorecard.pptx
+++ b/generated/Tier 1 Broker Scorecards/AMC Agents LLC_Broker_Scorecard.pptx
@@ -3357,7 +3357,7 @@
                         <a:rPr sz="800">
                           <a:latin typeface="Segoe UI"/>
                         </a:rPr>
-                        <a:t>$5,217,115.34 / $7,611,898.73 / $3,729,482.46</a:t>
+                        <a:t>$5,217,115.34 / $7,614,021.33 / $3,731,605.06</a:t>
                       </a:r>
                     </a:p>
                   </a:txBody>
@@ -3394,7 +3394,7 @@
                         <a:rPr sz="900">
                           <a:latin typeface="Segoe UI"/>
                         </a:rPr>
-                        <a:t>Tier 1  |  6.26% / 15.00%</a:t>
+                        <a:t>Tier 1  |  6.24% / 15.00%</a:t>
                       </a:r>
                     </a:p>
                   </a:txBody>
@@ -3653,7 +3653,7 @@
                         <a:rPr sz="900">
                           <a:latin typeface="Segoe UI"/>
                         </a:rPr>
-                        <a:t>Fleet Subs: 132  |  Binds: 10</a:t>
+                        <a:t>Fleet Subs: 135  |  Binds: 12</a:t>
                       </a:r>
                     </a:p>
                   </a:txBody>
@@ -3690,7 +3690,7 @@
                         <a:rPr sz="900">
                           <a:latin typeface="Segoe UI"/>
                         </a:rPr>
-                        <a:t>Fleet Bound Premium: $935,552.61</a:t>
+                        <a:t>Fleet Bound Premium: $1,076,284.03</a:t>
                       </a:r>
                     </a:p>
                   </a:txBody>
@@ -3727,7 +3727,7 @@
                         <a:rPr sz="900">
                           <a:latin typeface="Segoe UI"/>
                         </a:rPr>
-                        <a:t>Fleet Book %: 25.1%</a:t>
+                        <a:t>Fleet Book %: 28.8%</a:t>
                       </a:r>
                     </a:p>
                   </a:txBody>
@@ -3766,7 +3766,7 @@
                         <a:rPr sz="900">
                           <a:latin typeface="Segoe UI"/>
                         </a:rPr>
-                        <a:t>Non-Fleet Subs: 2377  |  Binds: 147</a:t>
+                        <a:t>Non-Fleet Subs: 2397  |  Binds: 146</a:t>
                       </a:r>
                     </a:p>
                   </a:txBody>
@@ -3803,7 +3803,7 @@
                         <a:rPr sz="900">
                           <a:latin typeface="Segoe UI"/>
                         </a:rPr>
-                        <a:t>Non-Fleet Bound Premium: $2,793,929.85</a:t>
+                        <a:t>Non-Fleet Bound Premium: $2,655,321.03</a:t>
                       </a:r>
                     </a:p>
                   </a:txBody>
@@ -3840,7 +3840,7 @@
                         <a:rPr sz="900">
                           <a:latin typeface="Segoe UI"/>
                         </a:rPr>
-                        <a:t>Non-Fleet Book %: 74.9%</a:t>
+                        <a:t>Non-Fleet Book %: 71.2%</a:t>
                       </a:r>
                     </a:p>
                   </a:txBody>
@@ -4311,7 +4311,7 @@
                         <a:rPr sz="800">
                           <a:latin typeface="Segoe UI"/>
                         </a:rPr>
-                        <a:t>303</a:t>
+                        <a:t>304</a:t>
                       </a:r>
                     </a:p>
                   </a:txBody>
@@ -4351,7 +4351,7 @@
                           </a:solidFill>
                           <a:latin typeface="Segoe UI"/>
                         </a:rPr>
-                        <a:t>581</a:t>
+                        <a:t>582</a:t>
                       </a:r>
                     </a:p>
                   </a:txBody>
@@ -4428,7 +4428,7 @@
                           </a:solidFill>
                           <a:latin typeface="Segoe UI"/>
                         </a:rPr>
-                        <a:t>578</a:t>
+                        <a:t>603</a:t>
                       </a:r>
                     </a:p>
                   </a:txBody>
@@ -4581,7 +4581,7 @@
                         <a:rPr sz="800">
                           <a:latin typeface="Segoe UI"/>
                         </a:rPr>
-                        <a:t>12.2%</a:t>
+                        <a:t>12.5%</a:t>
                       </a:r>
                     </a:p>
                   </a:txBody>
@@ -4747,7 +4747,7 @@
                         <a:rPr sz="800">
                           <a:latin typeface="Segoe UI"/>
                         </a:rPr>
-                        <a:t>12.9%</a:t>
+                        <a:t>13.2%</a:t>
                       </a:r>
                     </a:p>
                   </a:txBody>
@@ -4866,7 +4866,7 @@
                         <a:rPr sz="800">
                           <a:latin typeface="Segoe UI"/>
                         </a:rPr>
-                        <a:t>37</a:t>
+                        <a:t>38</a:t>
                       </a:r>
                     </a:p>
                   </a:txBody>
@@ -4983,7 +4983,7 @@
                           </a:solidFill>
                           <a:latin typeface="Segoe UI"/>
                         </a:rPr>
-                        <a:t>54</a:t>
+                        <a:t>56</a:t>
                       </a:r>
                     </a:p>
                   </a:txBody>
@@ -5020,7 +5020,7 @@
                         <a:rPr sz="800">
                           <a:latin typeface="Segoe UI"/>
                         </a:rPr>
-                        <a:t>53</a:t>
+                        <a:t>54</a:t>
                       </a:r>
                     </a:p>
                   </a:txBody>
@@ -5262,7 +5262,7 @@
                           </a:solidFill>
                           <a:latin typeface="Segoe UI"/>
                         </a:rPr>
-                        <a:t>$657.3K</a:t>
+                        <a:t>$659.4K</a:t>
                       </a:r>
                     </a:p>
                   </a:txBody>
@@ -5345,7 +5345,7 @@
                           </a:solidFill>
                           <a:latin typeface="Segoe UI"/>
                         </a:rPr>
-                        <a:t>$2.7K</a:t>
+                        <a:t>$53.2K</a:t>
                       </a:r>
                     </a:p>
                   </a:txBody>

--- a/generated/Tier 1 Broker Scorecards/AMC Agents LLC_Broker_Scorecard.pptx
+++ b/generated/Tier 1 Broker Scorecards/AMC Agents LLC_Broker_Scorecard.pptx
@@ -3394,7 +3394,7 @@
                         <a:rPr sz="900">
                           <a:latin typeface="Segoe UI"/>
                         </a:rPr>
-                        <a:t>Tier 1  |  6.24% / 15.00%</a:t>
+                        <a:t>Tier 1  |  6.20% / 15.00%</a:t>
                       </a:r>
                     </a:p>
                   </a:txBody>
@@ -3690,7 +3690,7 @@
                         <a:rPr sz="900">
                           <a:latin typeface="Segoe UI"/>
                         </a:rPr>
-                        <a:t>Fleet Bound Premium: $1,076,284.03</a:t>
+                        <a:t>Fleet Bound Premium: $1,081,513.54</a:t>
                       </a:r>
                     </a:p>
                   </a:txBody>
@@ -3727,7 +3727,7 @@
                         <a:rPr sz="900">
                           <a:latin typeface="Segoe UI"/>
                         </a:rPr>
-                        <a:t>Fleet Book %: 28.8%</a:t>
+                        <a:t>Fleet Book %: 29.0%</a:t>
                       </a:r>
                     </a:p>
                   </a:txBody>
@@ -3766,7 +3766,7 @@
                         <a:rPr sz="900">
                           <a:latin typeface="Segoe UI"/>
                         </a:rPr>
-                        <a:t>Non-Fleet Subs: 2397  |  Binds: 146</a:t>
+                        <a:t>Non-Fleet Subs: 2397  |  Binds: 145</a:t>
                       </a:r>
                     </a:p>
                   </a:txBody>
@@ -3803,7 +3803,7 @@
                         <a:rPr sz="900">
                           <a:latin typeface="Segoe UI"/>
                         </a:rPr>
-                        <a:t>Non-Fleet Bound Premium: $2,655,321.03</a:t>
+                        <a:t>Non-Fleet Bound Premium: $2,650,091.52</a:t>
                       </a:r>
                     </a:p>
                   </a:txBody>
@@ -3840,7 +3840,7 @@
                         <a:rPr sz="900">
                           <a:latin typeface="Segoe UI"/>
                         </a:rPr>
-                        <a:t>Non-Fleet Book %: 71.2%</a:t>
+                        <a:t>Non-Fleet Book %: 71.0%</a:t>
                       </a:r>
                     </a:p>
                   </a:txBody>
@@ -4311,7 +4311,7 @@
                         <a:rPr sz="800">
                           <a:latin typeface="Segoe UI"/>
                         </a:rPr>
-                        <a:t>304</a:t>
+                        <a:t>303</a:t>
                       </a:r>
                     </a:p>
                   </a:txBody>
@@ -4581,7 +4581,7 @@
                         <a:rPr sz="800">
                           <a:latin typeface="Segoe UI"/>
                         </a:rPr>
-                        <a:t>12.5%</a:t>
+                        <a:t>12.2%</a:t>
                       </a:r>
                     </a:p>
                   </a:txBody>
@@ -4624,7 +4624,7 @@
                           </a:solidFill>
                           <a:latin typeface="Segoe UI"/>
                         </a:rPr>
-                        <a:t>9.8%</a:t>
+                        <a:t>9.6%</a:t>
                       </a:r>
                     </a:p>
                   </a:txBody>
@@ -4866,7 +4866,7 @@
                         <a:rPr sz="800">
                           <a:latin typeface="Segoe UI"/>
                         </a:rPr>
-                        <a:t>38</a:t>
+                        <a:t>37</a:t>
                       </a:r>
                     </a:p>
                   </a:txBody>
@@ -4906,7 +4906,7 @@
                           </a:solidFill>
                           <a:latin typeface="Segoe UI"/>
                         </a:rPr>
-                        <a:t>57</a:t>
+                        <a:t>56</a:t>
                       </a:r>
                     </a:p>
                   </a:txBody>

--- a/generated/Tier 1 Broker Scorecards/AMC Agents LLC_Broker_Scorecard.pptx
+++ b/generated/Tier 1 Broker Scorecards/AMC Agents LLC_Broker_Scorecard.pptx
@@ -3357,7 +3357,7 @@
                         <a:rPr sz="800">
                           <a:latin typeface="Segoe UI"/>
                         </a:rPr>
-                        <a:t>$5,217,115.34 / $7,614,021.33 / $3,731,605.06</a:t>
+                        <a:t>$5,217,115.34 / $7,131,925.55 / $3,784,839.36</a:t>
                       </a:r>
                     </a:p>
                   </a:txBody>
@@ -3431,7 +3431,7 @@
                         <a:rPr sz="900">
                           <a:latin typeface="Segoe UI"/>
                         </a:rPr>
-                        <a:t>$7,303,961.48  (51.1% achieved)</a:t>
+                        <a:t>$7,303,961.48  (51.8% achieved)</a:t>
                       </a:r>
                     </a:p>
                   </a:txBody>
@@ -3690,7 +3690,7 @@
                         <a:rPr sz="900">
                           <a:latin typeface="Segoe UI"/>
                         </a:rPr>
-                        <a:t>Fleet Bound Premium: $1,081,513.54</a:t>
+                        <a:t>Fleet Bound Premium: $1,102,329.53</a:t>
                       </a:r>
                     </a:p>
                   </a:txBody>
@@ -3727,7 +3727,7 @@
                         <a:rPr sz="900">
                           <a:latin typeface="Segoe UI"/>
                         </a:rPr>
-                        <a:t>Fleet Book %: 29.0%</a:t>
+                        <a:t>Fleet Book %: 29.1%</a:t>
                       </a:r>
                     </a:p>
                   </a:txBody>
@@ -3766,7 +3766,7 @@
                         <a:rPr sz="900">
                           <a:latin typeface="Segoe UI"/>
                         </a:rPr>
-                        <a:t>Non-Fleet Subs: 2397  |  Binds: 145</a:t>
+                        <a:t>Non-Fleet Subs: 2399  |  Binds: 145</a:t>
                       </a:r>
                     </a:p>
                   </a:txBody>
@@ -3803,7 +3803,7 @@
                         <a:rPr sz="900">
                           <a:latin typeface="Segoe UI"/>
                         </a:rPr>
-                        <a:t>Non-Fleet Bound Premium: $2,650,091.52</a:t>
+                        <a:t>Non-Fleet Bound Premium: $2,682,509.83</a:t>
                       </a:r>
                     </a:p>
                   </a:txBody>
@@ -3840,7 +3840,7 @@
                         <a:rPr sz="900">
                           <a:latin typeface="Segoe UI"/>
                         </a:rPr>
-                        <a:t>Non-Fleet Book %: 71.0%</a:t>
+                        <a:t>Non-Fleet Book %: 70.9%</a:t>
                       </a:r>
                     </a:p>
                   </a:txBody>
@@ -4311,7 +4311,7 @@
                         <a:rPr sz="800">
                           <a:latin typeface="Segoe UI"/>
                         </a:rPr>
-                        <a:t>303</a:t>
+                        <a:t>304</a:t>
                       </a:r>
                     </a:p>
                   </a:txBody>
@@ -4428,7 +4428,7 @@
                           </a:solidFill>
                           <a:latin typeface="Segoe UI"/>
                         </a:rPr>
-                        <a:t>603</a:t>
+                        <a:t>605</a:t>
                       </a:r>
                     </a:p>
                   </a:txBody>
@@ -4500,9 +4500,12 @@
                       <a:pPr algn="ctr"/>
                       <a:r>
                         <a:rPr sz="800">
+                          <a:solidFill>
+                            <a:srgbClr val="DC2626"/>
+                          </a:solidFill>
                           <a:latin typeface="Segoe UI"/>
                         </a:rPr>
-                        <a:t/>
+                        <a:t>2</a:t>
                       </a:r>
                     </a:p>
                   </a:txBody>
@@ -4581,7 +4584,7 @@
                         <a:rPr sz="800">
                           <a:latin typeface="Segoe UI"/>
                         </a:rPr>
-                        <a:t>12.2%</a:t>
+                        <a:t>12.5%</a:t>
                       </a:r>
                     </a:p>
                   </a:txBody>
@@ -4747,7 +4750,7 @@
                         <a:rPr sz="800">
                           <a:latin typeface="Segoe UI"/>
                         </a:rPr>
-                        <a:t>13.2%</a:t>
+                        <a:t>12.9%</a:t>
                       </a:r>
                     </a:p>
                   </a:txBody>
@@ -4866,7 +4869,7 @@
                         <a:rPr sz="800">
                           <a:latin typeface="Segoe UI"/>
                         </a:rPr>
-                        <a:t>37</a:t>
+                        <a:t>38</a:t>
                       </a:r>
                     </a:p>
                   </a:txBody>
@@ -5020,7 +5023,7 @@
                         <a:rPr sz="800">
                           <a:latin typeface="Segoe UI"/>
                         </a:rPr>
-                        <a:t>54</a:t>
+                        <a:t>53</a:t>
                       </a:r>
                     </a:p>
                   </a:txBody>
